--- a/deliverables/deck/ZeroCloud_SIH26119.pptx
+++ b/deliverables/deck/ZeroCloud_SIH26119.pptx
@@ -14458,7 +14458,7 @@
                 <a:cs typeface="Arial"/>
                 <a:sym typeface="Arial"/>
               </a:rPr>
-              <a:t>Team ID –</a:t>
+              <a:t>Team ID –  175338</a:t>
             </a:r>
             <a:endParaRPr/>
           </a:p>
